--- a/courses/learn_sta/module01-01-timing-graph/slides.pptx
+++ b/courses/learn_sta/module01-01-timing-graph/slides.pptx
@@ -16,6 +16,9 @@
     <p:sldId id="264" r:id="rId16"/>
     <p:sldId id="265" r:id="rId17"/>
     <p:sldId id="266" r:id="rId18"/>
+    <p:sldId id="267" r:id="rId19"/>
+    <p:sldId id="268" r:id="rId20"/>
+    <p:sldId id="269" r:id="rId21"/>
   </p:sldIdLst>
   <p:sldSz cx="12191695" cy="6858000" type="screen4x3"/>
   <p:notesSz cx="6858000" cy="9144000"/>
@@ -582,7 +585,7 @@
           <a:lstStyle/>
           <a:p>
             <a:r>
-              <a:t>Do not mix setup and hold required maps. Do not propagate before the graph is levelized. After an edit or exception, recompute—stale tags lie.</a:t>
+              <a:t>In the browser lab, open **timing-graph**. Load the starter, run the analysis once, and read the metrics panel. Orient yourself—challenge panel, canvas, Check—then mirror the same goldens in code.</a:t>
             </a:r>
           </a:p>
         </p:txBody>
@@ -652,6 +655,146 @@
           <a:lstStyle/>
           <a:p>
             <a:r>
+              <a:t>In the implement track, use `common/tiny_timing.json` with the helpers in `common/graph.py` and `common/propagate.py`. Run `python3 common/test_propagate.py` (and the timing-graph test) until the goldens print ok.</a:t>
+            </a:r>
+          </a:p>
+        </p:txBody>
+      </p:sp>
+      <p:sp>
+        <p:nvSpPr>
+          <p:cNvPr id="4" name="Slide Number Placeholder 3"/>
+          <p:cNvSpPr>
+            <a:spLocks noGrp="1"/>
+          </p:cNvSpPr>
+          <p:nvPr>
+            <p:ph type="sldNum" idx="5" sz="quarter"/>
+          </p:nvPr>
+        </p:nvSpPr>
+        <p:spPr/>
+      </p:sp>
+    </p:spTree>
+  </p:cSld>
+  <p:clrMapOvr>
+    <a:masterClrMapping/>
+  </p:clrMapOvr>
+</p:notes>
+</file>
+
+<file path=ppt/notesSlides/notesSlide12.xml><?xml version="1.0" encoding="utf-8"?>
+<p:notes xmlns:a="http://schemas.openxmlformats.org/drawingml/2006/main" xmlns:p="http://schemas.openxmlformats.org/presentationml/2006/main" xmlns:r="http://schemas.openxmlformats.org/officeDocument/2006/relationships">
+  <p:cSld>
+    <p:spTree>
+      <p:nvGrpSpPr>
+        <p:cNvPr id="1" name=""/>
+        <p:cNvGrpSpPr/>
+        <p:nvPr/>
+      </p:nvGrpSpPr>
+      <p:grpSpPr>
+        <a:xfrm>
+          <a:off x="0" y="0"/>
+          <a:ext cx="0" cy="0"/>
+          <a:chOff x="0" y="0"/>
+          <a:chExt cx="0" cy="0"/>
+        </a:xfrm>
+      </p:grpSpPr>
+      <p:sp>
+        <p:nvSpPr>
+          <p:cNvPr id="2" name="Slide Image Placeholder 1"/>
+          <p:cNvSpPr>
+            <a:spLocks noGrp="1"/>
+          </p:cNvSpPr>
+          <p:nvPr>
+            <p:ph type="sldImg" idx="2"/>
+          </p:nvPr>
+        </p:nvSpPr>
+        <p:spPr/>
+      </p:sp>
+      <p:sp>
+        <p:nvSpPr>
+          <p:cNvPr id="3" name="Notes Placeholder 2"/>
+          <p:cNvSpPr>
+            <a:spLocks noGrp="1"/>
+          </p:cNvSpPr>
+          <p:nvPr>
+            <p:ph type="body" idx="3" sz="quarter"/>
+          </p:nvPr>
+        </p:nvSpPr>
+        <p:spPr/>
+        <p:txBody>
+          <a:bodyPr/>
+          <a:lstStyle/>
+          <a:p>
+            <a:r>
+              <a:t>Do not mix setup and hold required maps. Do not propagate before the graph is levelized. After an edit or exception, recompute—stale tags lie.</a:t>
+            </a:r>
+          </a:p>
+        </p:txBody>
+      </p:sp>
+      <p:sp>
+        <p:nvSpPr>
+          <p:cNvPr id="4" name="Slide Number Placeholder 3"/>
+          <p:cNvSpPr>
+            <a:spLocks noGrp="1"/>
+          </p:cNvSpPr>
+          <p:nvPr>
+            <p:ph type="sldNum" idx="5" sz="quarter"/>
+          </p:nvPr>
+        </p:nvSpPr>
+        <p:spPr/>
+      </p:sp>
+    </p:spTree>
+  </p:cSld>
+  <p:clrMapOvr>
+    <a:masterClrMapping/>
+  </p:clrMapOvr>
+</p:notes>
+</file>
+
+<file path=ppt/notesSlides/notesSlide13.xml><?xml version="1.0" encoding="utf-8"?>
+<p:notes xmlns:a="http://schemas.openxmlformats.org/drawingml/2006/main" xmlns:p="http://schemas.openxmlformats.org/presentationml/2006/main" xmlns:r="http://schemas.openxmlformats.org/officeDocument/2006/relationships">
+  <p:cSld>
+    <p:spTree>
+      <p:nvGrpSpPr>
+        <p:cNvPr id="1" name=""/>
+        <p:cNvGrpSpPr/>
+        <p:nvPr/>
+      </p:nvGrpSpPr>
+      <p:grpSpPr>
+        <a:xfrm>
+          <a:off x="0" y="0"/>
+          <a:ext cx="0" cy="0"/>
+          <a:chOff x="0" y="0"/>
+          <a:chExt cx="0" cy="0"/>
+        </a:xfrm>
+      </p:grpSpPr>
+      <p:sp>
+        <p:nvSpPr>
+          <p:cNvPr id="2" name="Slide Image Placeholder 1"/>
+          <p:cNvSpPr>
+            <a:spLocks noGrp="1"/>
+          </p:cNvSpPr>
+          <p:nvPr>
+            <p:ph type="sldImg" idx="2"/>
+          </p:nvPr>
+        </p:nvSpPr>
+        <p:spPr/>
+      </p:sp>
+      <p:sp>
+        <p:nvSpPr>
+          <p:cNvPr id="3" name="Notes Placeholder 2"/>
+          <p:cNvSpPr>
+            <a:spLocks noGrp="1"/>
+          </p:cNvSpPr>
+          <p:nvPr>
+            <p:ph type="body" idx="3" sz="quarter"/>
+          </p:nvPr>
+        </p:nvSpPr>
+        <p:spPr/>
+        <p:txBody>
+          <a:bodyPr/>
+          <a:lstStyle/>
+          <a:p>
+            <a:r>
               <a:t>Finish the checklist on at least one track—preferably both. When your numbers match the goldens, take the quiz, then continue.</a:t>
             </a:r>
           </a:p>
@@ -725,12 +868,6 @@
               <a:t>Goldens: six pins, five arcs, levels zero through five, path delay three point two. A cycle returns no levels. Keep these numbers handy—the browser challenges and Track A tests use the same instance.</a:t>
             </a:r>
           </a:p>
-          <a:p/>
-          <a:p>
-            <a:r>
-              <a:t>&lt;!-- algorithm-walkthrough --&gt;</a:t>
-            </a:r>
-          </a:p>
         </p:txBody>
       </p:sp>
       <p:sp>
@@ -798,7 +935,13 @@
           <a:lstStyle/>
           <a:p>
             <a:r>
-              <a:t>Six pins form one path from primary input in through two cells to out. Net arcs are dashed; cell arcs are solid. This is the shared starter for every STA lab.</a:t>
+              <a:t>Pseudocode for this lab is Kahn levelize on a pin and arc timing graph. Inputs are pins and delayed arcs. The loop peels indegree-zero pins and writes levels. Stop with failure if a cycle leaves pins unvisited.</a:t>
+            </a:r>
+          </a:p>
+          <a:p/>
+          <a:p>
+            <a:r>
+              <a:t>Open this module's examples file and find the Pseudocode section. That written sketch is what you implement on the implement track and what the browser challenges measure.</a:t>
             </a:r>
           </a:p>
         </p:txBody>
@@ -868,7 +1011,7 @@
           <a:lstStyle/>
           <a:p>
             <a:r>
-              <a:t>A source has no incoming arc; a sink has no outgoing arc. On this chain, in is the only source and out is the only sink.</a:t>
+              <a:t>On the tiny chain the sketch returns levels zero through five with out at five. Six pins and five arcs are the shared instance. Adding out to in makes levelize fail—that is the cycle golden.</a:t>
             </a:r>
           </a:p>
         </p:txBody>
@@ -938,7 +1081,7 @@
           <a:lstStyle/>
           <a:p>
             <a:r>
-              <a:t>Process pins with indegree zero, then peel successors. out lands at level 5 on this chain.</a:t>
+              <a:t>Six pins form one path from primary input in through two cells to out. Net arcs are dashed; cell arcs are solid. This is the shared starter for every STA lab.</a:t>
             </a:r>
           </a:p>
         </p:txBody>
@@ -1008,7 +1151,7 @@
           <a:lstStyle/>
           <a:p>
             <a:r>
-              <a:t>Sorting pins by level gives the topo order. Path delay sums to 3.2; cell arcs alone sum to 2.7.</a:t>
+              <a:t>A source has no incoming arc; a sink has no outgoing arc. On this chain, in is the only source and out is the only sink.</a:t>
             </a:r>
           </a:p>
         </p:txBody>
@@ -1078,13 +1221,7 @@
           <a:lstStyle/>
           <a:p>
             <a:r>
-              <a:t>Add a back-edge from out to in and Kahn's algorithm stalls. Timing graphs for STA must be acyclic.</a:t>
-            </a:r>
-          </a:p>
-          <a:p/>
-          <a:p>
-            <a:r>
-              <a:t>&lt;!-- /algorithm-walkthrough --&gt;</a:t>
+              <a:t>Process pins with indegree zero, then peel successors. out lands at level 5 on this chain.</a:t>
             </a:r>
           </a:p>
         </p:txBody>
@@ -1154,7 +1291,7 @@
           <a:lstStyle/>
           <a:p>
             <a:r>
-              <a:t>In the browser lab, open **timing-graph**. Load the starter, run the analysis once, and read the metrics panel. Orient yourself—challenge panel, canvas, Check—then mirror the same goldens in code.</a:t>
+              <a:t>Sorting pins by level gives the topo order. Path delay sums to 3.2; cell arcs alone sum to 2.7.</a:t>
             </a:r>
           </a:p>
         </p:txBody>
@@ -1224,7 +1361,7 @@
           <a:lstStyle/>
           <a:p>
             <a:r>
-              <a:t>In the implement track, use `common/tiny_timing.json` with the helpers in `common/graph.py` and `common/propagate.py`. Run `python3 common/test_propagate.py` (and the timing-graph test) until the goldens print ok.</a:t>
+              <a:t>Add a back-edge from out to in and Kahn's algorithm stalls. Timing graphs for STA must be acyclic.</a:t>
             </a:r>
           </a:p>
         </p:txBody>
@@ -4382,21 +4519,45 @@
                 </a:solidFill>
                 <a:latin typeface="Calibri"/>
               </a:rPr>
-              <a:t>Pitfall</a:t>
-            </a:r>
-          </a:p>
-        </p:txBody>
-      </p:sp>
-      <p:sp>
-        <p:nvSpPr>
-          <p:cNvPr id="3" name="TextBox 2"/>
+              <a:t>A cycle fails levelize</a:t>
+            </a:r>
+          </a:p>
+        </p:txBody>
+      </p:sp>
+      <p:pic>
+        <p:nvPicPr>
+          <p:cNvPr id="3" name="Picture 2" descr="05-cycle-reject.png"/>
+          <p:cNvPicPr>
+            <a:picLocks noChangeAspect="1"/>
+          </p:cNvPicPr>
+          <p:nvPr/>
+        </p:nvPicPr>
+        <p:blipFill>
+          <a:blip r:embed="rId2"/>
+          <a:stretch>
+            <a:fillRect/>
+          </a:stretch>
+        </p:blipFill>
+        <p:spPr>
+          <a:xfrm>
+            <a:off x="548640" y="1143000"/>
+            <a:ext cx="9404113" cy="4572000"/>
+          </a:xfrm>
+          <a:prstGeom prst="rect">
+            <a:avLst/>
+          </a:prstGeom>
+        </p:spPr>
+      </p:pic>
+      <p:sp>
+        <p:nvSpPr>
+          <p:cNvPr id="4" name="TextBox 3"/>
           <p:cNvSpPr txBox="1"/>
           <p:nvPr/>
         </p:nvSpPr>
         <p:spPr>
           <a:xfrm>
-            <a:off x="548640" y="1234440"/>
-            <a:ext cx="11064240" cy="4937760"/>
+            <a:off x="548640" y="5897880"/>
+            <a:ext cx="11064240" cy="411480"/>
           </a:xfrm>
           <a:prstGeom prst="rect">
             <a:avLst/>
@@ -4409,76 +4570,26 @@
           </a:bodyPr>
           <a:lstStyle/>
           <a:p>
-            <a:pPr lvl="0" marL="457200" indent="-228600">
-              <a:buFont typeface="Calibri"/>
-              <a:spcAft>
-                <a:spcPts val="1000"/>
-              </a:spcAft>
-              <a:buSzPct val="100000"/>
-              <a:buChar char="•"/>
+            <a:pPr>
               <a:lnSpc>
                 <a:spcPts val="2200"/>
               </a:lnSpc>
             </a:pPr>
             <a:r>
-              <a:rPr sz="2000" b="0">
+              <a:rPr sz="1200" b="0">
                 <a:solidFill>
                   <a:srgbClr val="333333"/>
                 </a:solidFill>
                 <a:latin typeface="Calibri"/>
               </a:rPr>
-              <a:t>Do not mix setup and hold required maps</a:t>
-            </a:r>
-          </a:p>
-          <a:p>
-            <a:pPr lvl="0" marL="457200" indent="-228600">
-              <a:buFont typeface="Calibri"/>
-              <a:spcAft>
-                <a:spcPts val="1000"/>
-              </a:spcAft>
-              <a:buSzPct val="100000"/>
-              <a:buChar char="•"/>
-              <a:lnSpc>
-                <a:spcPts val="2200"/>
-              </a:lnSpc>
-            </a:pPr>
-            <a:r>
-              <a:rPr sz="2000" b="0">
-                <a:solidFill>
-                  <a:srgbClr val="333333"/>
-                </a:solidFill>
-                <a:latin typeface="Calibri"/>
-              </a:rPr>
-              <a:t>Do not propagate before the graph is levelized</a:t>
-            </a:r>
-          </a:p>
-          <a:p>
-            <a:pPr lvl="0" marL="457200" indent="-228600">
-              <a:buFont typeface="Calibri"/>
-              <a:spcAft>
-                <a:spcPts val="1000"/>
-              </a:spcAft>
-              <a:buSzPct val="100000"/>
-              <a:buChar char="•"/>
-              <a:lnSpc>
-                <a:spcPts val="2200"/>
-              </a:lnSpc>
-            </a:pPr>
-            <a:r>
-              <a:rPr sz="2000" b="0">
-                <a:solidFill>
-                  <a:srgbClr val="333333"/>
-                </a:solidFill>
-                <a:latin typeface="Calibri"/>
-              </a:rPr>
-              <a:t>After an edit or exception, recompute, stale tags lie</a:t>
-            </a:r>
-          </a:p>
-        </p:txBody>
-      </p:sp>
-      <p:sp>
-        <p:nvSpPr>
-          <p:cNvPr id="4" name="TextBox 3"/>
+              <a:t>A cycle fails levelize</a:t>
+            </a:r>
+          </a:p>
+        </p:txBody>
+      </p:sp>
+      <p:sp>
+        <p:nvSpPr>
+          <p:cNvPr id="5" name="TextBox 4"/>
           <p:cNvSpPr txBox="1"/>
           <p:nvPr/>
         </p:nvSpPr>
@@ -4567,6 +4678,548 @@
                 </a:solidFill>
                 <a:latin typeface="Calibri"/>
               </a:rPr>
+              <a:t>Browser lab track</a:t>
+            </a:r>
+          </a:p>
+        </p:txBody>
+      </p:sp>
+      <p:sp>
+        <p:nvSpPr>
+          <p:cNvPr id="3" name="TextBox 2"/>
+          <p:cNvSpPr txBox="1"/>
+          <p:nvPr/>
+        </p:nvSpPr>
+        <p:spPr>
+          <a:xfrm>
+            <a:off x="548640" y="1234440"/>
+            <a:ext cx="11064240" cy="4937760"/>
+          </a:xfrm>
+          <a:prstGeom prst="rect">
+            <a:avLst/>
+          </a:prstGeom>
+          <a:noFill/>
+        </p:spPr>
+        <p:txBody>
+          <a:bodyPr wrap="square">
+            <a:noAutofit/>
+          </a:bodyPr>
+          <a:lstStyle/>
+          <a:p>
+            <a:pPr lvl="0" marL="457200" indent="-228600">
+              <a:buFont typeface="Calibri"/>
+              <a:spcAft>
+                <a:spcPts val="1000"/>
+              </a:spcAft>
+              <a:buSzPct val="100000"/>
+              <a:buChar char="•"/>
+              <a:lnSpc>
+                <a:spcPts val="2200"/>
+              </a:lnSpc>
+            </a:pPr>
+            <a:r>
+              <a:rPr sz="2000" b="0">
+                <a:solidFill>
+                  <a:srgbClr val="333333"/>
+                </a:solidFill>
+                <a:latin typeface="Calibri"/>
+              </a:rPr>
+              <a:t>In the browser lab, open </a:t>
+            </a:r>
+            <a:r>
+              <a:rPr sz="2000" b="1">
+                <a:solidFill>
+                  <a:srgbClr val="333333"/>
+                </a:solidFill>
+                <a:latin typeface="Calibri"/>
+              </a:rPr>
+              <a:t>timing-graph</a:t>
+            </a:r>
+          </a:p>
+          <a:p>
+            <a:pPr lvl="0" marL="457200" indent="-228600">
+              <a:buFont typeface="Calibri"/>
+              <a:spcAft>
+                <a:spcPts val="1000"/>
+              </a:spcAft>
+              <a:buSzPct val="100000"/>
+              <a:buChar char="•"/>
+              <a:lnSpc>
+                <a:spcPts val="2200"/>
+              </a:lnSpc>
+            </a:pPr>
+            <a:r>
+              <a:rPr sz="2000" b="0">
+                <a:solidFill>
+                  <a:srgbClr val="333333"/>
+                </a:solidFill>
+                <a:latin typeface="Calibri"/>
+              </a:rPr>
+              <a:t>Load the starter, run the analysis once, and read the metrics panel</a:t>
+            </a:r>
+          </a:p>
+          <a:p>
+            <a:pPr lvl="0" marL="457200" indent="-228600">
+              <a:buFont typeface="Calibri"/>
+              <a:spcAft>
+                <a:spcPts val="1000"/>
+              </a:spcAft>
+              <a:buSzPct val="100000"/>
+              <a:buChar char="•"/>
+              <a:lnSpc>
+                <a:spcPts val="2200"/>
+              </a:lnSpc>
+            </a:pPr>
+            <a:r>
+              <a:rPr sz="2000" b="0">
+                <a:solidFill>
+                  <a:srgbClr val="333333"/>
+                </a:solidFill>
+                <a:latin typeface="Calibri"/>
+              </a:rPr>
+              <a:t>Orient yourself, challenge panel, canvas, Check, then mirror the same goldens in code</a:t>
+            </a:r>
+          </a:p>
+        </p:txBody>
+      </p:sp>
+      <p:sp>
+        <p:nvSpPr>
+          <p:cNvPr id="4" name="TextBox 3"/>
+          <p:cNvSpPr txBox="1"/>
+          <p:nvPr/>
+        </p:nvSpPr>
+        <p:spPr>
+          <a:xfrm>
+            <a:off x="548640" y="6355080"/>
+            <a:ext cx="11064240" cy="320040"/>
+          </a:xfrm>
+          <a:prstGeom prst="rect">
+            <a:avLst/>
+          </a:prstGeom>
+          <a:noFill/>
+        </p:spPr>
+        <p:txBody>
+          <a:bodyPr wrap="square">
+            <a:noAutofit/>
+          </a:bodyPr>
+          <a:lstStyle/>
+          <a:p>
+            <a:pPr algn="r">
+              <a:lnSpc>
+                <a:spcPts val="2200"/>
+              </a:lnSpc>
+              <a:defRPr sz="1000" b="0">
+                <a:solidFill>
+                  <a:srgbClr val="666666"/>
+                </a:solidFill>
+                <a:latin typeface="Calibri"/>
+              </a:defRPr>
+            </a:pPr>
+            <a:r>
+              <a:t>learn_sta — 01 timing graph</a:t>
+            </a:r>
+          </a:p>
+        </p:txBody>
+      </p:sp>
+    </p:spTree>
+  </p:cSld>
+  <p:clrMapOvr>
+    <a:masterClrMapping/>
+  </p:clrMapOvr>
+</p:sld>
+</file>
+
+<file path=ppt/slides/slide12.xml><?xml version="1.0" encoding="utf-8"?>
+<p:sld xmlns:a="http://schemas.openxmlformats.org/drawingml/2006/main" xmlns:p="http://schemas.openxmlformats.org/presentationml/2006/main" xmlns:r="http://schemas.openxmlformats.org/officeDocument/2006/relationships">
+  <p:cSld>
+    <p:spTree>
+      <p:nvGrpSpPr>
+        <p:cNvPr id="1" name=""/>
+        <p:cNvGrpSpPr/>
+        <p:nvPr/>
+      </p:nvGrpSpPr>
+      <p:grpSpPr/>
+      <p:sp>
+        <p:nvSpPr>
+          <p:cNvPr id="2" name="TextBox 1"/>
+          <p:cNvSpPr txBox="1"/>
+          <p:nvPr/>
+        </p:nvSpPr>
+        <p:spPr>
+          <a:xfrm>
+            <a:off x="548640" y="411480"/>
+            <a:ext cx="11064240" cy="777240"/>
+          </a:xfrm>
+          <a:prstGeom prst="rect">
+            <a:avLst/>
+          </a:prstGeom>
+          <a:noFill/>
+        </p:spPr>
+        <p:txBody>
+          <a:bodyPr wrap="square">
+            <a:noAutofit/>
+          </a:bodyPr>
+          <a:lstStyle/>
+          <a:p>
+            <a:pPr>
+              <a:lnSpc>
+                <a:spcPts val="2200"/>
+              </a:lnSpc>
+            </a:pPr>
+            <a:r>
+              <a:rPr sz="2800" b="1">
+                <a:solidFill>
+                  <a:srgbClr val="1A1A2E"/>
+                </a:solidFill>
+                <a:latin typeface="Calibri"/>
+              </a:rPr>
+              <a:t>Implement track</a:t>
+            </a:r>
+          </a:p>
+        </p:txBody>
+      </p:sp>
+      <p:sp>
+        <p:nvSpPr>
+          <p:cNvPr id="3" name="TextBox 2"/>
+          <p:cNvSpPr txBox="1"/>
+          <p:nvPr/>
+        </p:nvSpPr>
+        <p:spPr>
+          <a:xfrm>
+            <a:off x="548640" y="1234440"/>
+            <a:ext cx="11064240" cy="4937760"/>
+          </a:xfrm>
+          <a:prstGeom prst="rect">
+            <a:avLst/>
+          </a:prstGeom>
+          <a:noFill/>
+        </p:spPr>
+        <p:txBody>
+          <a:bodyPr wrap="square">
+            <a:noAutofit/>
+          </a:bodyPr>
+          <a:lstStyle/>
+          <a:p>
+            <a:pPr lvl="0" marL="457200" indent="-228600">
+              <a:buFont typeface="Calibri"/>
+              <a:spcAft>
+                <a:spcPts val="1000"/>
+              </a:spcAft>
+              <a:buSzPct val="100000"/>
+              <a:buChar char="•"/>
+              <a:lnSpc>
+                <a:spcPts val="2200"/>
+              </a:lnSpc>
+            </a:pPr>
+            <a:r>
+              <a:rPr sz="2000" b="0">
+                <a:solidFill>
+                  <a:srgbClr val="333333"/>
+                </a:solidFill>
+                <a:latin typeface="Calibri"/>
+              </a:rPr>
+              <a:t>In the implement track</a:t>
+            </a:r>
+          </a:p>
+          <a:p>
+            <a:pPr lvl="0" marL="457200" indent="-228600">
+              <a:buFont typeface="Calibri"/>
+              <a:spcAft>
+                <a:spcPts val="1000"/>
+              </a:spcAft>
+              <a:buSzPct val="100000"/>
+              <a:buChar char="•"/>
+              <a:lnSpc>
+                <a:spcPts val="2200"/>
+              </a:lnSpc>
+            </a:pPr>
+            <a:r>
+              <a:rPr sz="2000" b="0">
+                <a:solidFill>
+                  <a:srgbClr val="333333"/>
+                </a:solidFill>
+                <a:latin typeface="Calibri"/>
+              </a:rPr>
+              <a:t>Run `python3 common/test_propagate.py` (and the timing-graph test) until the goldens print</a:t>
+            </a:r>
+          </a:p>
+        </p:txBody>
+      </p:sp>
+      <p:sp>
+        <p:nvSpPr>
+          <p:cNvPr id="4" name="TextBox 3"/>
+          <p:cNvSpPr txBox="1"/>
+          <p:nvPr/>
+        </p:nvSpPr>
+        <p:spPr>
+          <a:xfrm>
+            <a:off x="548640" y="6355080"/>
+            <a:ext cx="11064240" cy="320040"/>
+          </a:xfrm>
+          <a:prstGeom prst="rect">
+            <a:avLst/>
+          </a:prstGeom>
+          <a:noFill/>
+        </p:spPr>
+        <p:txBody>
+          <a:bodyPr wrap="square">
+            <a:noAutofit/>
+          </a:bodyPr>
+          <a:lstStyle/>
+          <a:p>
+            <a:pPr algn="r">
+              <a:lnSpc>
+                <a:spcPts val="2200"/>
+              </a:lnSpc>
+              <a:defRPr sz="1000" b="0">
+                <a:solidFill>
+                  <a:srgbClr val="666666"/>
+                </a:solidFill>
+                <a:latin typeface="Calibri"/>
+              </a:defRPr>
+            </a:pPr>
+            <a:r>
+              <a:t>learn_sta — 01 timing graph</a:t>
+            </a:r>
+          </a:p>
+        </p:txBody>
+      </p:sp>
+    </p:spTree>
+  </p:cSld>
+  <p:clrMapOvr>
+    <a:masterClrMapping/>
+  </p:clrMapOvr>
+</p:sld>
+</file>
+
+<file path=ppt/slides/slide13.xml><?xml version="1.0" encoding="utf-8"?>
+<p:sld xmlns:a="http://schemas.openxmlformats.org/drawingml/2006/main" xmlns:p="http://schemas.openxmlformats.org/presentationml/2006/main" xmlns:r="http://schemas.openxmlformats.org/officeDocument/2006/relationships">
+  <p:cSld>
+    <p:spTree>
+      <p:nvGrpSpPr>
+        <p:cNvPr id="1" name=""/>
+        <p:cNvGrpSpPr/>
+        <p:nvPr/>
+      </p:nvGrpSpPr>
+      <p:grpSpPr/>
+      <p:sp>
+        <p:nvSpPr>
+          <p:cNvPr id="2" name="TextBox 1"/>
+          <p:cNvSpPr txBox="1"/>
+          <p:nvPr/>
+        </p:nvSpPr>
+        <p:spPr>
+          <a:xfrm>
+            <a:off x="548640" y="411480"/>
+            <a:ext cx="11064240" cy="777240"/>
+          </a:xfrm>
+          <a:prstGeom prst="rect">
+            <a:avLst/>
+          </a:prstGeom>
+          <a:noFill/>
+        </p:spPr>
+        <p:txBody>
+          <a:bodyPr wrap="square">
+            <a:noAutofit/>
+          </a:bodyPr>
+          <a:lstStyle/>
+          <a:p>
+            <a:pPr>
+              <a:lnSpc>
+                <a:spcPts val="2200"/>
+              </a:lnSpc>
+            </a:pPr>
+            <a:r>
+              <a:rPr sz="2800" b="1">
+                <a:solidFill>
+                  <a:srgbClr val="1A1A2E"/>
+                </a:solidFill>
+                <a:latin typeface="Calibri"/>
+              </a:rPr>
+              <a:t>Pitfall</a:t>
+            </a:r>
+          </a:p>
+        </p:txBody>
+      </p:sp>
+      <p:sp>
+        <p:nvSpPr>
+          <p:cNvPr id="3" name="TextBox 2"/>
+          <p:cNvSpPr txBox="1"/>
+          <p:nvPr/>
+        </p:nvSpPr>
+        <p:spPr>
+          <a:xfrm>
+            <a:off x="548640" y="1234440"/>
+            <a:ext cx="11064240" cy="4937760"/>
+          </a:xfrm>
+          <a:prstGeom prst="rect">
+            <a:avLst/>
+          </a:prstGeom>
+          <a:noFill/>
+        </p:spPr>
+        <p:txBody>
+          <a:bodyPr wrap="square">
+            <a:noAutofit/>
+          </a:bodyPr>
+          <a:lstStyle/>
+          <a:p>
+            <a:pPr lvl="0" marL="457200" indent="-228600">
+              <a:buFont typeface="Calibri"/>
+              <a:spcAft>
+                <a:spcPts val="1000"/>
+              </a:spcAft>
+              <a:buSzPct val="100000"/>
+              <a:buChar char="•"/>
+              <a:lnSpc>
+                <a:spcPts val="2200"/>
+              </a:lnSpc>
+            </a:pPr>
+            <a:r>
+              <a:rPr sz="2000" b="0">
+                <a:solidFill>
+                  <a:srgbClr val="333333"/>
+                </a:solidFill>
+                <a:latin typeface="Calibri"/>
+              </a:rPr>
+              <a:t>Do not mix setup and hold required maps</a:t>
+            </a:r>
+          </a:p>
+          <a:p>
+            <a:pPr lvl="0" marL="457200" indent="-228600">
+              <a:buFont typeface="Calibri"/>
+              <a:spcAft>
+                <a:spcPts val="1000"/>
+              </a:spcAft>
+              <a:buSzPct val="100000"/>
+              <a:buChar char="•"/>
+              <a:lnSpc>
+                <a:spcPts val="2200"/>
+              </a:lnSpc>
+            </a:pPr>
+            <a:r>
+              <a:rPr sz="2000" b="0">
+                <a:solidFill>
+                  <a:srgbClr val="333333"/>
+                </a:solidFill>
+                <a:latin typeface="Calibri"/>
+              </a:rPr>
+              <a:t>Do not propagate before the graph is levelized</a:t>
+            </a:r>
+          </a:p>
+          <a:p>
+            <a:pPr lvl="0" marL="457200" indent="-228600">
+              <a:buFont typeface="Calibri"/>
+              <a:spcAft>
+                <a:spcPts val="1000"/>
+              </a:spcAft>
+              <a:buSzPct val="100000"/>
+              <a:buChar char="•"/>
+              <a:lnSpc>
+                <a:spcPts val="2200"/>
+              </a:lnSpc>
+            </a:pPr>
+            <a:r>
+              <a:rPr sz="2000" b="0">
+                <a:solidFill>
+                  <a:srgbClr val="333333"/>
+                </a:solidFill>
+                <a:latin typeface="Calibri"/>
+              </a:rPr>
+              <a:t>After an edit or exception, recompute, stale tags lie</a:t>
+            </a:r>
+          </a:p>
+        </p:txBody>
+      </p:sp>
+      <p:sp>
+        <p:nvSpPr>
+          <p:cNvPr id="4" name="TextBox 3"/>
+          <p:cNvSpPr txBox="1"/>
+          <p:nvPr/>
+        </p:nvSpPr>
+        <p:spPr>
+          <a:xfrm>
+            <a:off x="548640" y="6355080"/>
+            <a:ext cx="11064240" cy="320040"/>
+          </a:xfrm>
+          <a:prstGeom prst="rect">
+            <a:avLst/>
+          </a:prstGeom>
+          <a:noFill/>
+        </p:spPr>
+        <p:txBody>
+          <a:bodyPr wrap="square">
+            <a:noAutofit/>
+          </a:bodyPr>
+          <a:lstStyle/>
+          <a:p>
+            <a:pPr algn="r">
+              <a:lnSpc>
+                <a:spcPts val="2200"/>
+              </a:lnSpc>
+              <a:defRPr sz="1000" b="0">
+                <a:solidFill>
+                  <a:srgbClr val="666666"/>
+                </a:solidFill>
+                <a:latin typeface="Calibri"/>
+              </a:defRPr>
+            </a:pPr>
+            <a:r>
+              <a:t>learn_sta — 01 timing graph</a:t>
+            </a:r>
+          </a:p>
+        </p:txBody>
+      </p:sp>
+    </p:spTree>
+  </p:cSld>
+  <p:clrMapOvr>
+    <a:masterClrMapping/>
+  </p:clrMapOvr>
+</p:sld>
+</file>
+
+<file path=ppt/slides/slide14.xml><?xml version="1.0" encoding="utf-8"?>
+<p:sld xmlns:a="http://schemas.openxmlformats.org/drawingml/2006/main" xmlns:p="http://schemas.openxmlformats.org/presentationml/2006/main" xmlns:r="http://schemas.openxmlformats.org/officeDocument/2006/relationships">
+  <p:cSld>
+    <p:spTree>
+      <p:nvGrpSpPr>
+        <p:cNvPr id="1" name=""/>
+        <p:cNvGrpSpPr/>
+        <p:nvPr/>
+      </p:nvGrpSpPr>
+      <p:grpSpPr/>
+      <p:sp>
+        <p:nvSpPr>
+          <p:cNvPr id="2" name="TextBox 1"/>
+          <p:cNvSpPr txBox="1"/>
+          <p:nvPr/>
+        </p:nvSpPr>
+        <p:spPr>
+          <a:xfrm>
+            <a:off x="548640" y="411480"/>
+            <a:ext cx="11064240" cy="777240"/>
+          </a:xfrm>
+          <a:prstGeom prst="rect">
+            <a:avLst/>
+          </a:prstGeom>
+          <a:noFill/>
+        </p:spPr>
+        <p:txBody>
+          <a:bodyPr wrap="square">
+            <a:noAutofit/>
+          </a:bodyPr>
+          <a:lstStyle/>
+          <a:p>
+            <a:pPr>
+              <a:lnSpc>
+                <a:spcPts val="2200"/>
+              </a:lnSpc>
+            </a:pPr>
+            <a:r>
+              <a:rPr sz="2800" b="1">
+                <a:solidFill>
+                  <a:srgbClr val="1A1A2E"/>
+                </a:solidFill>
+                <a:latin typeface="Calibri"/>
+              </a:rPr>
               <a:t>Your turn</a:t>
             </a:r>
           </a:p>
@@ -4822,6 +5475,125 @@
               <a:t>Keep these numbers handy, the browser challenges and Track A tests use the same instance</a:t>
             </a:r>
           </a:p>
+        </p:txBody>
+      </p:sp>
+      <p:sp>
+        <p:nvSpPr>
+          <p:cNvPr id="4" name="TextBox 3"/>
+          <p:cNvSpPr txBox="1"/>
+          <p:nvPr/>
+        </p:nvSpPr>
+        <p:spPr>
+          <a:xfrm>
+            <a:off x="548640" y="6355080"/>
+            <a:ext cx="11064240" cy="320040"/>
+          </a:xfrm>
+          <a:prstGeom prst="rect">
+            <a:avLst/>
+          </a:prstGeom>
+          <a:noFill/>
+        </p:spPr>
+        <p:txBody>
+          <a:bodyPr wrap="square">
+            <a:noAutofit/>
+          </a:bodyPr>
+          <a:lstStyle/>
+          <a:p>
+            <a:pPr algn="r">
+              <a:lnSpc>
+                <a:spcPts val="2200"/>
+              </a:lnSpc>
+              <a:defRPr sz="1000" b="0">
+                <a:solidFill>
+                  <a:srgbClr val="666666"/>
+                </a:solidFill>
+                <a:latin typeface="Calibri"/>
+              </a:defRPr>
+            </a:pPr>
+            <a:r>
+              <a:t>learn_sta — 01 timing graph</a:t>
+            </a:r>
+          </a:p>
+        </p:txBody>
+      </p:sp>
+    </p:spTree>
+  </p:cSld>
+  <p:clrMapOvr>
+    <a:masterClrMapping/>
+  </p:clrMapOvr>
+</p:sld>
+</file>
+
+<file path=ppt/slides/slide3.xml><?xml version="1.0" encoding="utf-8"?>
+<p:sld xmlns:a="http://schemas.openxmlformats.org/drawingml/2006/main" xmlns:p="http://schemas.openxmlformats.org/presentationml/2006/main" xmlns:r="http://schemas.openxmlformats.org/officeDocument/2006/relationships">
+  <p:cSld>
+    <p:spTree>
+      <p:nvGrpSpPr>
+        <p:cNvPr id="1" name=""/>
+        <p:cNvGrpSpPr/>
+        <p:nvPr/>
+      </p:nvGrpSpPr>
+      <p:grpSpPr/>
+      <p:sp>
+        <p:nvSpPr>
+          <p:cNvPr id="2" name="TextBox 1"/>
+          <p:cNvSpPr txBox="1"/>
+          <p:nvPr/>
+        </p:nvSpPr>
+        <p:spPr>
+          <a:xfrm>
+            <a:off x="548640" y="411480"/>
+            <a:ext cx="11064240" cy="777240"/>
+          </a:xfrm>
+          <a:prstGeom prst="rect">
+            <a:avLst/>
+          </a:prstGeom>
+          <a:noFill/>
+        </p:spPr>
+        <p:txBody>
+          <a:bodyPr wrap="square">
+            <a:noAutofit/>
+          </a:bodyPr>
+          <a:lstStyle/>
+          <a:p>
+            <a:pPr>
+              <a:lnSpc>
+                <a:spcPts val="2200"/>
+              </a:lnSpc>
+            </a:pPr>
+            <a:r>
+              <a:rPr sz="2800" b="1">
+                <a:solidFill>
+                  <a:srgbClr val="1A1A2E"/>
+                </a:solidFill>
+                <a:latin typeface="Calibri"/>
+              </a:rPr>
+              <a:t>Pseudocode</a:t>
+            </a:r>
+          </a:p>
+        </p:txBody>
+      </p:sp>
+      <p:sp>
+        <p:nvSpPr>
+          <p:cNvPr id="3" name="TextBox 2"/>
+          <p:cNvSpPr txBox="1"/>
+          <p:nvPr/>
+        </p:nvSpPr>
+        <p:spPr>
+          <a:xfrm>
+            <a:off x="548640" y="1234440"/>
+            <a:ext cx="11064240" cy="4937760"/>
+          </a:xfrm>
+          <a:prstGeom prst="rect">
+            <a:avLst/>
+          </a:prstGeom>
+          <a:noFill/>
+        </p:spPr>
+        <p:txBody>
+          <a:bodyPr wrap="square">
+            <a:noAutofit/>
+          </a:bodyPr>
+          <a:lstStyle/>
           <a:p>
             <a:pPr lvl="0" marL="457200" indent="-228600">
               <a:buFont typeface="Calibri"/>
@@ -4841,7 +5613,117 @@
                 </a:solidFill>
                 <a:latin typeface="Calibri"/>
               </a:rPr>
-              <a:t>&lt;!-- algorithm-walkthrough --&gt;</a:t>
+              <a:t>Pseudocode for this lab is Kahn levelize on a pin and arc timing graph</a:t>
+            </a:r>
+          </a:p>
+          <a:p>
+            <a:pPr lvl="0" marL="457200" indent="-228600">
+              <a:buFont typeface="Calibri"/>
+              <a:spcAft>
+                <a:spcPts val="1000"/>
+              </a:spcAft>
+              <a:buSzPct val="100000"/>
+              <a:buChar char="•"/>
+              <a:lnSpc>
+                <a:spcPts val="2200"/>
+              </a:lnSpc>
+            </a:pPr>
+            <a:r>
+              <a:rPr sz="2000" b="0">
+                <a:solidFill>
+                  <a:srgbClr val="333333"/>
+                </a:solidFill>
+                <a:latin typeface="Calibri"/>
+              </a:rPr>
+              <a:t>Inputs are pins and delayed arcs</a:t>
+            </a:r>
+          </a:p>
+          <a:p>
+            <a:pPr lvl="0" marL="457200" indent="-228600">
+              <a:buFont typeface="Calibri"/>
+              <a:spcAft>
+                <a:spcPts val="1000"/>
+              </a:spcAft>
+              <a:buSzPct val="100000"/>
+              <a:buChar char="•"/>
+              <a:lnSpc>
+                <a:spcPts val="2200"/>
+              </a:lnSpc>
+            </a:pPr>
+            <a:r>
+              <a:rPr sz="2000" b="0">
+                <a:solidFill>
+                  <a:srgbClr val="333333"/>
+                </a:solidFill>
+                <a:latin typeface="Calibri"/>
+              </a:rPr>
+              <a:t>The loop peels indegree-zero pins and writes levels</a:t>
+            </a:r>
+          </a:p>
+          <a:p>
+            <a:pPr lvl="0" marL="457200" indent="-228600">
+              <a:buFont typeface="Calibri"/>
+              <a:spcAft>
+                <a:spcPts val="1000"/>
+              </a:spcAft>
+              <a:buSzPct val="100000"/>
+              <a:buChar char="•"/>
+              <a:lnSpc>
+                <a:spcPts val="2200"/>
+              </a:lnSpc>
+            </a:pPr>
+            <a:r>
+              <a:rPr sz="2000" b="0">
+                <a:solidFill>
+                  <a:srgbClr val="333333"/>
+                </a:solidFill>
+                <a:latin typeface="Calibri"/>
+              </a:rPr>
+              <a:t>Stop with failure if a cycle leaves pins unvisited</a:t>
+            </a:r>
+          </a:p>
+          <a:p>
+            <a:pPr lvl="0" marL="457200" indent="-228600">
+              <a:buFont typeface="Calibri"/>
+              <a:spcAft>
+                <a:spcPts val="1000"/>
+              </a:spcAft>
+              <a:buSzPct val="100000"/>
+              <a:buChar char="•"/>
+              <a:lnSpc>
+                <a:spcPts val="2200"/>
+              </a:lnSpc>
+            </a:pPr>
+            <a:r>
+              <a:rPr sz="2000" b="0">
+                <a:solidFill>
+                  <a:srgbClr val="333333"/>
+                </a:solidFill>
+                <a:latin typeface="Calibri"/>
+              </a:rPr>
+              <a:t>Open this module's examples file and find the Pseudocode section</a:t>
+            </a:r>
+          </a:p>
+          <a:p>
+            <a:pPr lvl="0" marL="457200" indent="-228600">
+              <a:buFont typeface="Calibri"/>
+              <a:spcAft>
+                <a:spcPts val="1000"/>
+              </a:spcAft>
+              <a:buSzPct val="100000"/>
+              <a:buChar char="•"/>
+              <a:lnSpc>
+                <a:spcPts val="2200"/>
+              </a:lnSpc>
+            </a:pPr>
+            <a:r>
+              <a:rPr sz="2000" b="0">
+                <a:solidFill>
+                  <a:srgbClr val="333333"/>
+                </a:solidFill>
+                <a:latin typeface="Calibri"/>
+              </a:rPr>
+              <a:t>That written sketch is what you implement on the implement track and what the browser</a:t>
             </a:r>
           </a:p>
         </p:txBody>
@@ -4893,7 +5775,484 @@
 </p:sld>
 </file>
 
-<file path=ppt/slides/slide3.xml><?xml version="1.0" encoding="utf-8"?>
+<file path=ppt/slides/slide4.xml><?xml version="1.0" encoding="utf-8"?>
+<p:sld xmlns:a="http://schemas.openxmlformats.org/drawingml/2006/main" xmlns:p="http://schemas.openxmlformats.org/presentationml/2006/main" xmlns:r="http://schemas.openxmlformats.org/officeDocument/2006/relationships">
+  <p:cSld>
+    <p:spTree>
+      <p:nvGrpSpPr>
+        <p:cNvPr id="1" name=""/>
+        <p:cNvGrpSpPr/>
+        <p:nvPr/>
+      </p:nvGrpSpPr>
+      <p:grpSpPr/>
+      <p:sp>
+        <p:nvSpPr>
+          <p:cNvPr id="2" name="TextBox 1"/>
+          <p:cNvSpPr txBox="1"/>
+          <p:nvPr/>
+        </p:nvSpPr>
+        <p:spPr>
+          <a:xfrm>
+            <a:off x="548640" y="411480"/>
+            <a:ext cx="11064240" cy="777240"/>
+          </a:xfrm>
+          <a:prstGeom prst="rect">
+            <a:avLst/>
+          </a:prstGeom>
+          <a:noFill/>
+        </p:spPr>
+        <p:txBody>
+          <a:bodyPr wrap="square">
+            <a:noAutofit/>
+          </a:bodyPr>
+          <a:lstStyle/>
+          <a:p>
+            <a:pPr>
+              <a:lnSpc>
+                <a:spcPts val="2200"/>
+              </a:lnSpc>
+            </a:pPr>
+            <a:r>
+              <a:rPr sz="2800" b="1">
+                <a:solidFill>
+                  <a:srgbClr val="1A1A2E"/>
+                </a:solidFill>
+                <a:latin typeface="Calibri"/>
+              </a:rPr>
+              <a:t>Algorithm sketch</a:t>
+            </a:r>
+          </a:p>
+        </p:txBody>
+      </p:sp>
+      <p:sp>
+        <p:nvSpPr>
+          <p:cNvPr id="3" name="TextBox 2"/>
+          <p:cNvSpPr txBox="1"/>
+          <p:nvPr/>
+        </p:nvSpPr>
+        <p:spPr>
+          <a:xfrm>
+            <a:off x="548640" y="1234440"/>
+            <a:ext cx="11064240" cy="4937760"/>
+          </a:xfrm>
+          <a:prstGeom prst="rect">
+            <a:avLst/>
+          </a:prstGeom>
+          <a:noFill/>
+        </p:spPr>
+        <p:txBody>
+          <a:bodyPr wrap="square">
+            <a:noAutofit/>
+          </a:bodyPr>
+          <a:lstStyle/>
+          <a:p>
+            <a:pPr lvl="0" marL="457200" indent="-228600">
+              <a:buFont typeface="Calibri"/>
+              <a:spcAft>
+                <a:spcPts val="1000"/>
+              </a:spcAft>
+              <a:buSzPct val="100000"/>
+              <a:buChar char="•"/>
+              <a:lnSpc>
+                <a:spcPts val="2200"/>
+              </a:lnSpc>
+            </a:pPr>
+            <a:r>
+              <a:rPr sz="2000" b="0">
+                <a:solidFill>
+                  <a:srgbClr val="333333"/>
+                </a:solidFill>
+                <a:latin typeface="Calibri"/>
+              </a:rPr>
+              <a:t>On the tiny chain the sketch returns levels zero through five with out at five</a:t>
+            </a:r>
+          </a:p>
+          <a:p>
+            <a:pPr lvl="0" marL="457200" indent="-228600">
+              <a:buFont typeface="Calibri"/>
+              <a:spcAft>
+                <a:spcPts val="1000"/>
+              </a:spcAft>
+              <a:buSzPct val="100000"/>
+              <a:buChar char="•"/>
+              <a:lnSpc>
+                <a:spcPts val="2200"/>
+              </a:lnSpc>
+            </a:pPr>
+            <a:r>
+              <a:rPr sz="2000" b="0">
+                <a:solidFill>
+                  <a:srgbClr val="333333"/>
+                </a:solidFill>
+                <a:latin typeface="Calibri"/>
+              </a:rPr>
+              <a:t>Six pins and five arcs are the shared instance</a:t>
+            </a:r>
+          </a:p>
+          <a:p>
+            <a:pPr lvl="0" marL="457200" indent="-228600">
+              <a:buFont typeface="Calibri"/>
+              <a:spcAft>
+                <a:spcPts val="1000"/>
+              </a:spcAft>
+              <a:buSzPct val="100000"/>
+              <a:buChar char="•"/>
+              <a:lnSpc>
+                <a:spcPts val="2200"/>
+              </a:lnSpc>
+            </a:pPr>
+            <a:r>
+              <a:rPr sz="2000" b="0">
+                <a:solidFill>
+                  <a:srgbClr val="333333"/>
+                </a:solidFill>
+                <a:latin typeface="Calibri"/>
+              </a:rPr>
+              <a:t>Adding out to in makes levelize fail, that is the cycle golden</a:t>
+            </a:r>
+          </a:p>
+        </p:txBody>
+      </p:sp>
+      <p:sp>
+        <p:nvSpPr>
+          <p:cNvPr id="4" name="TextBox 3"/>
+          <p:cNvSpPr txBox="1"/>
+          <p:nvPr/>
+        </p:nvSpPr>
+        <p:spPr>
+          <a:xfrm>
+            <a:off x="548640" y="6355080"/>
+            <a:ext cx="11064240" cy="320040"/>
+          </a:xfrm>
+          <a:prstGeom prst="rect">
+            <a:avLst/>
+          </a:prstGeom>
+          <a:noFill/>
+        </p:spPr>
+        <p:txBody>
+          <a:bodyPr wrap="square">
+            <a:noAutofit/>
+          </a:bodyPr>
+          <a:lstStyle/>
+          <a:p>
+            <a:pPr algn="r">
+              <a:lnSpc>
+                <a:spcPts val="2200"/>
+              </a:lnSpc>
+              <a:defRPr sz="1000" b="0">
+                <a:solidFill>
+                  <a:srgbClr val="666666"/>
+                </a:solidFill>
+                <a:latin typeface="Calibri"/>
+              </a:defRPr>
+            </a:pPr>
+            <a:r>
+              <a:t>learn_sta — 01 timing graph</a:t>
+            </a:r>
+          </a:p>
+        </p:txBody>
+      </p:sp>
+    </p:spTree>
+  </p:cSld>
+  <p:clrMapOvr>
+    <a:masterClrMapping/>
+  </p:clrMapOvr>
+</p:sld>
+</file>
+
+<file path=ppt/slides/slide5.xml><?xml version="1.0" encoding="utf-8"?>
+<p:sld xmlns:a="http://schemas.openxmlformats.org/drawingml/2006/main" xmlns:p="http://schemas.openxmlformats.org/presentationml/2006/main" xmlns:r="http://schemas.openxmlformats.org/officeDocument/2006/relationships">
+  <p:cSld>
+    <p:spTree>
+      <p:nvGrpSpPr>
+        <p:cNvPr id="1" name=""/>
+        <p:cNvGrpSpPr/>
+        <p:nvPr/>
+      </p:nvGrpSpPr>
+      <p:grpSpPr/>
+      <p:sp>
+        <p:nvSpPr>
+          <p:cNvPr id="2" name="TextBox 1"/>
+          <p:cNvSpPr txBox="1"/>
+          <p:nvPr/>
+        </p:nvSpPr>
+        <p:spPr>
+          <a:xfrm>
+            <a:off x="548640" y="411480"/>
+            <a:ext cx="11064240" cy="777240"/>
+          </a:xfrm>
+          <a:prstGeom prst="rect">
+            <a:avLst/>
+          </a:prstGeom>
+          <a:noFill/>
+        </p:spPr>
+        <p:txBody>
+          <a:bodyPr wrap="square">
+            <a:noAutofit/>
+          </a:bodyPr>
+          <a:lstStyle/>
+          <a:p>
+            <a:pPr>
+              <a:lnSpc>
+                <a:spcPts val="2200"/>
+              </a:lnSpc>
+            </a:pPr>
+            <a:r>
+              <a:rPr sz="2800" b="1">
+                <a:solidFill>
+                  <a:srgbClr val="1A1A2E"/>
+                </a:solidFill>
+                <a:latin typeface="Calibri"/>
+              </a:rPr>
+              <a:t>Algorithm sketch — try these</a:t>
+            </a:r>
+          </a:p>
+        </p:txBody>
+      </p:sp>
+      <p:sp>
+        <p:nvSpPr>
+          <p:cNvPr id="3" name="TextBox 2"/>
+          <p:cNvSpPr txBox="1"/>
+          <p:nvPr/>
+        </p:nvSpPr>
+        <p:spPr>
+          <a:xfrm>
+            <a:off x="548640" y="1143000"/>
+            <a:ext cx="11064240" cy="5029200"/>
+          </a:xfrm>
+          <a:prstGeom prst="rect">
+            <a:avLst/>
+          </a:prstGeom>
+          <a:solidFill>
+            <a:srgbClr val="F4F4F4"/>
+          </a:solidFill>
+        </p:spPr>
+        <p:txBody>
+          <a:bodyPr wrap="square">
+            <a:noAutofit/>
+          </a:bodyPr>
+          <a:lstStyle/>
+          <a:p>
+            <a:pPr>
+              <a:lnSpc>
+                <a:spcPts val="2200"/>
+              </a:lnSpc>
+              <a:spcAft>
+                <a:spcPts val="400"/>
+              </a:spcAft>
+            </a:pPr>
+            <a:r>
+              <a:rPr sz="2000" b="0">
+                <a:solidFill>
+                  <a:srgbClr val="333333"/>
+                </a:solidFill>
+                <a:latin typeface="Consolas"/>
+              </a:rPr>
+              <a:t>INPUT: pins, arcs (delay, kind cell|net)</a:t>
+            </a:r>
+          </a:p>
+          <a:p>
+            <a:pPr>
+              <a:lnSpc>
+                <a:spcPts val="2200"/>
+              </a:lnSpc>
+              <a:spcAft>
+                <a:spcPts val="400"/>
+              </a:spcAft>
+            </a:pPr>
+            <a:r>
+              <a:rPr sz="2000" b="0">
+                <a:solidFill>
+                  <a:srgbClr val="333333"/>
+                </a:solidFill>
+                <a:latin typeface="Consolas"/>
+              </a:rPr>
+              <a:t>OUTPUT: levels[] or FAIL(cycle)</a:t>
+            </a:r>
+          </a:p>
+          <a:p>
+            <a:pPr>
+              <a:lnSpc>
+                <a:spcPts val="2200"/>
+              </a:lnSpc>
+              <a:spcAft>
+                <a:spcPts val="400"/>
+              </a:spcAft>
+            </a:pPr>
+            <a:r>
+              <a:rPr sz="2000" b="0">
+                <a:solidFill>
+                  <a:srgbClr val="333333"/>
+                </a:solidFill>
+                <a:latin typeface="Consolas"/>
+              </a:rPr>
+              <a:t>indeg[v]←|preds|; Q←{v|indeg=0}; level[Q]=0</a:t>
+            </a:r>
+          </a:p>
+          <a:p>
+            <a:pPr>
+              <a:lnSpc>
+                <a:spcPts val="2200"/>
+              </a:lnSpc>
+              <a:spcAft>
+                <a:spcPts val="400"/>
+              </a:spcAft>
+            </a:pPr>
+            <a:r>
+              <a:rPr sz="2000" b="0">
+                <a:solidFill>
+                  <a:srgbClr val="333333"/>
+                </a:solidFill>
+                <a:latin typeface="Consolas"/>
+              </a:rPr>
+              <a:t>while Q:</a:t>
+            </a:r>
+          </a:p>
+          <a:p>
+            <a:pPr>
+              <a:lnSpc>
+                <a:spcPts val="2200"/>
+              </a:lnSpc>
+              <a:spcAft>
+                <a:spcPts val="400"/>
+              </a:spcAft>
+            </a:pPr>
+            <a:r>
+              <a:rPr sz="2000" b="0">
+                <a:solidFill>
+                  <a:srgbClr val="333333"/>
+                </a:solidFill>
+                <a:latin typeface="Consolas"/>
+              </a:rPr>
+              <a:t>  u←pop; for v in succ(u):</a:t>
+            </a:r>
+          </a:p>
+          <a:p>
+            <a:pPr>
+              <a:lnSpc>
+                <a:spcPts val="2200"/>
+              </a:lnSpc>
+              <a:spcAft>
+                <a:spcPts val="400"/>
+              </a:spcAft>
+            </a:pPr>
+            <a:r>
+              <a:rPr sz="2000" b="0">
+                <a:solidFill>
+                  <a:srgbClr val="333333"/>
+                </a:solidFill>
+                <a:latin typeface="Consolas"/>
+              </a:rPr>
+              <a:t>    indeg[v]−=1; level[v]←max(level[v],level[u]+1)</a:t>
+            </a:r>
+          </a:p>
+          <a:p>
+            <a:pPr>
+              <a:lnSpc>
+                <a:spcPts val="2200"/>
+              </a:lnSpc>
+              <a:spcAft>
+                <a:spcPts val="400"/>
+              </a:spcAft>
+            </a:pPr>
+            <a:r>
+              <a:rPr sz="2000" b="0">
+                <a:solidFill>
+                  <a:srgbClr val="333333"/>
+                </a:solidFill>
+                <a:latin typeface="Consolas"/>
+              </a:rPr>
+              <a:t>    if indeg[v]=0: push v</a:t>
+            </a:r>
+          </a:p>
+          <a:p>
+            <a:pPr>
+              <a:lnSpc>
+                <a:spcPts val="2200"/>
+              </a:lnSpc>
+              <a:spcAft>
+                <a:spcPts val="400"/>
+              </a:spcAft>
+            </a:pPr>
+            <a:r>
+              <a:rPr sz="2000" b="0">
+                <a:solidFill>
+                  <a:srgbClr val="333333"/>
+                </a:solidFill>
+                <a:latin typeface="Consolas"/>
+              </a:rPr>
+              <a:t>FAIL if not all visited else return levels</a:t>
+            </a:r>
+          </a:p>
+          <a:p>
+            <a:pPr>
+              <a:lnSpc>
+                <a:spcPts val="2200"/>
+              </a:lnSpc>
+              <a:spcAft>
+                <a:spcPts val="400"/>
+              </a:spcAft>
+            </a:pPr>
+            <a:r>
+              <a:rPr sz="2000" b="0">
+                <a:solidFill>
+                  <a:srgbClr val="333333"/>
+                </a:solidFill>
+                <a:latin typeface="Consolas"/>
+              </a:rPr>
+              <a:t>GOLDEN: 6 pins, 5 arcs; in:0 … out:5</a:t>
+            </a:r>
+          </a:p>
+        </p:txBody>
+      </p:sp>
+      <p:sp>
+        <p:nvSpPr>
+          <p:cNvPr id="4" name="TextBox 3"/>
+          <p:cNvSpPr txBox="1"/>
+          <p:nvPr/>
+        </p:nvSpPr>
+        <p:spPr>
+          <a:xfrm>
+            <a:off x="548640" y="6355080"/>
+            <a:ext cx="11064240" cy="320040"/>
+          </a:xfrm>
+          <a:prstGeom prst="rect">
+            <a:avLst/>
+          </a:prstGeom>
+          <a:noFill/>
+        </p:spPr>
+        <p:txBody>
+          <a:bodyPr wrap="square">
+            <a:noAutofit/>
+          </a:bodyPr>
+          <a:lstStyle/>
+          <a:p>
+            <a:pPr algn="r">
+              <a:lnSpc>
+                <a:spcPts val="2200"/>
+              </a:lnSpc>
+              <a:defRPr sz="1000" b="0">
+                <a:solidFill>
+                  <a:srgbClr val="666666"/>
+                </a:solidFill>
+                <a:latin typeface="Calibri"/>
+              </a:defRPr>
+            </a:pPr>
+            <a:r>
+              <a:t>learn_sta — 01 timing graph</a:t>
+            </a:r>
+          </a:p>
+        </p:txBody>
+      </p:sp>
+    </p:spTree>
+  </p:cSld>
+  <p:clrMapOvr>
+    <a:masterClrMapping/>
+  </p:clrMapOvr>
+</p:sld>
+</file>
+
+<file path=ppt/slides/slide6.xml><?xml version="1.0" encoding="utf-8"?>
 <p:sld xmlns:a="http://schemas.openxmlformats.org/drawingml/2006/main" xmlns:p="http://schemas.openxmlformats.org/presentationml/2006/main" xmlns:r="http://schemas.openxmlformats.org/officeDocument/2006/relationships">
   <p:cSld>
     <p:spTree>
@@ -5052,7 +6411,7 @@
 </p:sld>
 </file>
 
-<file path=ppt/slides/slide4.xml><?xml version="1.0" encoding="utf-8"?>
+<file path=ppt/slides/slide7.xml><?xml version="1.0" encoding="utf-8"?>
 <p:sld xmlns:a="http://schemas.openxmlformats.org/drawingml/2006/main" xmlns:p="http://schemas.openxmlformats.org/presentationml/2006/main" xmlns:r="http://schemas.openxmlformats.org/officeDocument/2006/relationships">
   <p:cSld>
     <p:spTree>
@@ -5211,7 +6570,7 @@
 </p:sld>
 </file>
 
-<file path=ppt/slides/slide5.xml><?xml version="1.0" encoding="utf-8"?>
+<file path=ppt/slides/slide8.xml><?xml version="1.0" encoding="utf-8"?>
 <p:sld xmlns:a="http://schemas.openxmlformats.org/drawingml/2006/main" xmlns:p="http://schemas.openxmlformats.org/presentationml/2006/main" xmlns:r="http://schemas.openxmlformats.org/officeDocument/2006/relationships">
   <p:cSld>
     <p:spTree>
@@ -5370,7 +6729,7 @@
 </p:sld>
 </file>
 
-<file path=ppt/slides/slide6.xml><?xml version="1.0" encoding="utf-8"?>
+<file path=ppt/slides/slide9.xml><?xml version="1.0" encoding="utf-8"?>
 <p:sld xmlns:a="http://schemas.openxmlformats.org/drawingml/2006/main" xmlns:p="http://schemas.openxmlformats.org/presentationml/2006/main" xmlns:r="http://schemas.openxmlformats.org/officeDocument/2006/relationships">
   <p:cSld>
     <p:spTree>
@@ -5485,522 +6844,6 @@
       <p:sp>
         <p:nvSpPr>
           <p:cNvPr id="5" name="TextBox 4"/>
-          <p:cNvSpPr txBox="1"/>
-          <p:nvPr/>
-        </p:nvSpPr>
-        <p:spPr>
-          <a:xfrm>
-            <a:off x="548640" y="6355080"/>
-            <a:ext cx="11064240" cy="320040"/>
-          </a:xfrm>
-          <a:prstGeom prst="rect">
-            <a:avLst/>
-          </a:prstGeom>
-          <a:noFill/>
-        </p:spPr>
-        <p:txBody>
-          <a:bodyPr wrap="square">
-            <a:noAutofit/>
-          </a:bodyPr>
-          <a:lstStyle/>
-          <a:p>
-            <a:pPr algn="r">
-              <a:lnSpc>
-                <a:spcPts val="2200"/>
-              </a:lnSpc>
-              <a:defRPr sz="1000" b="0">
-                <a:solidFill>
-                  <a:srgbClr val="666666"/>
-                </a:solidFill>
-                <a:latin typeface="Calibri"/>
-              </a:defRPr>
-            </a:pPr>
-            <a:r>
-              <a:t>learn_sta — 01 timing graph</a:t>
-            </a:r>
-          </a:p>
-        </p:txBody>
-      </p:sp>
-    </p:spTree>
-  </p:cSld>
-  <p:clrMapOvr>
-    <a:masterClrMapping/>
-  </p:clrMapOvr>
-</p:sld>
-</file>
-
-<file path=ppt/slides/slide7.xml><?xml version="1.0" encoding="utf-8"?>
-<p:sld xmlns:a="http://schemas.openxmlformats.org/drawingml/2006/main" xmlns:p="http://schemas.openxmlformats.org/presentationml/2006/main" xmlns:r="http://schemas.openxmlformats.org/officeDocument/2006/relationships">
-  <p:cSld>
-    <p:spTree>
-      <p:nvGrpSpPr>
-        <p:cNvPr id="1" name=""/>
-        <p:cNvGrpSpPr/>
-        <p:nvPr/>
-      </p:nvGrpSpPr>
-      <p:grpSpPr/>
-      <p:sp>
-        <p:nvSpPr>
-          <p:cNvPr id="2" name="TextBox 1"/>
-          <p:cNvSpPr txBox="1"/>
-          <p:nvPr/>
-        </p:nvSpPr>
-        <p:spPr>
-          <a:xfrm>
-            <a:off x="548640" y="411480"/>
-            <a:ext cx="11064240" cy="777240"/>
-          </a:xfrm>
-          <a:prstGeom prst="rect">
-            <a:avLst/>
-          </a:prstGeom>
-          <a:noFill/>
-        </p:spPr>
-        <p:txBody>
-          <a:bodyPr wrap="square">
-            <a:noAutofit/>
-          </a:bodyPr>
-          <a:lstStyle/>
-          <a:p>
-            <a:pPr>
-              <a:lnSpc>
-                <a:spcPts val="2200"/>
-              </a:lnSpc>
-            </a:pPr>
-            <a:r>
-              <a:rPr sz="2800" b="1">
-                <a:solidFill>
-                  <a:srgbClr val="1A1A2E"/>
-                </a:solidFill>
-                <a:latin typeface="Calibri"/>
-              </a:rPr>
-              <a:t>A cycle fails levelize</a:t>
-            </a:r>
-          </a:p>
-        </p:txBody>
-      </p:sp>
-      <p:pic>
-        <p:nvPicPr>
-          <p:cNvPr id="3" name="Picture 2" descr="05-cycle-reject.png"/>
-          <p:cNvPicPr>
-            <a:picLocks noChangeAspect="1"/>
-          </p:cNvPicPr>
-          <p:nvPr/>
-        </p:nvPicPr>
-        <p:blipFill>
-          <a:blip r:embed="rId2"/>
-          <a:stretch>
-            <a:fillRect/>
-          </a:stretch>
-        </p:blipFill>
-        <p:spPr>
-          <a:xfrm>
-            <a:off x="548640" y="1143000"/>
-            <a:ext cx="9404113" cy="4572000"/>
-          </a:xfrm>
-          <a:prstGeom prst="rect">
-            <a:avLst/>
-          </a:prstGeom>
-        </p:spPr>
-      </p:pic>
-      <p:sp>
-        <p:nvSpPr>
-          <p:cNvPr id="4" name="TextBox 3"/>
-          <p:cNvSpPr txBox="1"/>
-          <p:nvPr/>
-        </p:nvSpPr>
-        <p:spPr>
-          <a:xfrm>
-            <a:off x="548640" y="5897880"/>
-            <a:ext cx="11064240" cy="411480"/>
-          </a:xfrm>
-          <a:prstGeom prst="rect">
-            <a:avLst/>
-          </a:prstGeom>
-          <a:noFill/>
-        </p:spPr>
-        <p:txBody>
-          <a:bodyPr wrap="square">
-            <a:noAutofit/>
-          </a:bodyPr>
-          <a:lstStyle/>
-          <a:p>
-            <a:pPr>
-              <a:lnSpc>
-                <a:spcPts val="2200"/>
-              </a:lnSpc>
-            </a:pPr>
-            <a:r>
-              <a:rPr sz="1200" b="0">
-                <a:solidFill>
-                  <a:srgbClr val="333333"/>
-                </a:solidFill>
-                <a:latin typeface="Calibri"/>
-              </a:rPr>
-              <a:t>A cycle fails levelize</a:t>
-            </a:r>
-          </a:p>
-        </p:txBody>
-      </p:sp>
-      <p:sp>
-        <p:nvSpPr>
-          <p:cNvPr id="5" name="TextBox 4"/>
-          <p:cNvSpPr txBox="1"/>
-          <p:nvPr/>
-        </p:nvSpPr>
-        <p:spPr>
-          <a:xfrm>
-            <a:off x="548640" y="6355080"/>
-            <a:ext cx="11064240" cy="320040"/>
-          </a:xfrm>
-          <a:prstGeom prst="rect">
-            <a:avLst/>
-          </a:prstGeom>
-          <a:noFill/>
-        </p:spPr>
-        <p:txBody>
-          <a:bodyPr wrap="square">
-            <a:noAutofit/>
-          </a:bodyPr>
-          <a:lstStyle/>
-          <a:p>
-            <a:pPr algn="r">
-              <a:lnSpc>
-                <a:spcPts val="2200"/>
-              </a:lnSpc>
-              <a:defRPr sz="1000" b="0">
-                <a:solidFill>
-                  <a:srgbClr val="666666"/>
-                </a:solidFill>
-                <a:latin typeface="Calibri"/>
-              </a:defRPr>
-            </a:pPr>
-            <a:r>
-              <a:t>learn_sta — 01 timing graph</a:t>
-            </a:r>
-          </a:p>
-        </p:txBody>
-      </p:sp>
-    </p:spTree>
-  </p:cSld>
-  <p:clrMapOvr>
-    <a:masterClrMapping/>
-  </p:clrMapOvr>
-</p:sld>
-</file>
-
-<file path=ppt/slides/slide8.xml><?xml version="1.0" encoding="utf-8"?>
-<p:sld xmlns:a="http://schemas.openxmlformats.org/drawingml/2006/main" xmlns:p="http://schemas.openxmlformats.org/presentationml/2006/main" xmlns:r="http://schemas.openxmlformats.org/officeDocument/2006/relationships">
-  <p:cSld>
-    <p:spTree>
-      <p:nvGrpSpPr>
-        <p:cNvPr id="1" name=""/>
-        <p:cNvGrpSpPr/>
-        <p:nvPr/>
-      </p:nvGrpSpPr>
-      <p:grpSpPr/>
-      <p:sp>
-        <p:nvSpPr>
-          <p:cNvPr id="2" name="TextBox 1"/>
-          <p:cNvSpPr txBox="1"/>
-          <p:nvPr/>
-        </p:nvSpPr>
-        <p:spPr>
-          <a:xfrm>
-            <a:off x="548640" y="411480"/>
-            <a:ext cx="11064240" cy="777240"/>
-          </a:xfrm>
-          <a:prstGeom prst="rect">
-            <a:avLst/>
-          </a:prstGeom>
-          <a:noFill/>
-        </p:spPr>
-        <p:txBody>
-          <a:bodyPr wrap="square">
-            <a:noAutofit/>
-          </a:bodyPr>
-          <a:lstStyle/>
-          <a:p>
-            <a:pPr>
-              <a:lnSpc>
-                <a:spcPts val="2200"/>
-              </a:lnSpc>
-            </a:pPr>
-            <a:r>
-              <a:rPr sz="2800" b="1">
-                <a:solidFill>
-                  <a:srgbClr val="1A1A2E"/>
-                </a:solidFill>
-                <a:latin typeface="Calibri"/>
-              </a:rPr>
-              <a:t>Browser lab track</a:t>
-            </a:r>
-          </a:p>
-        </p:txBody>
-      </p:sp>
-      <p:sp>
-        <p:nvSpPr>
-          <p:cNvPr id="3" name="TextBox 2"/>
-          <p:cNvSpPr txBox="1"/>
-          <p:nvPr/>
-        </p:nvSpPr>
-        <p:spPr>
-          <a:xfrm>
-            <a:off x="548640" y="1234440"/>
-            <a:ext cx="11064240" cy="4937760"/>
-          </a:xfrm>
-          <a:prstGeom prst="rect">
-            <a:avLst/>
-          </a:prstGeom>
-          <a:noFill/>
-        </p:spPr>
-        <p:txBody>
-          <a:bodyPr wrap="square">
-            <a:noAutofit/>
-          </a:bodyPr>
-          <a:lstStyle/>
-          <a:p>
-            <a:pPr lvl="0" marL="457200" indent="-228600">
-              <a:buFont typeface="Calibri"/>
-              <a:spcAft>
-                <a:spcPts val="1000"/>
-              </a:spcAft>
-              <a:buSzPct val="100000"/>
-              <a:buChar char="•"/>
-              <a:lnSpc>
-                <a:spcPts val="2200"/>
-              </a:lnSpc>
-            </a:pPr>
-            <a:r>
-              <a:rPr sz="2000" b="0">
-                <a:solidFill>
-                  <a:srgbClr val="333333"/>
-                </a:solidFill>
-                <a:latin typeface="Calibri"/>
-              </a:rPr>
-              <a:t>In the browser lab, open </a:t>
-            </a:r>
-            <a:r>
-              <a:rPr sz="2000" b="1">
-                <a:solidFill>
-                  <a:srgbClr val="333333"/>
-                </a:solidFill>
-                <a:latin typeface="Calibri"/>
-              </a:rPr>
-              <a:t>timing-graph</a:t>
-            </a:r>
-          </a:p>
-          <a:p>
-            <a:pPr lvl="0" marL="457200" indent="-228600">
-              <a:buFont typeface="Calibri"/>
-              <a:spcAft>
-                <a:spcPts val="1000"/>
-              </a:spcAft>
-              <a:buSzPct val="100000"/>
-              <a:buChar char="•"/>
-              <a:lnSpc>
-                <a:spcPts val="2200"/>
-              </a:lnSpc>
-            </a:pPr>
-            <a:r>
-              <a:rPr sz="2000" b="0">
-                <a:solidFill>
-                  <a:srgbClr val="333333"/>
-                </a:solidFill>
-                <a:latin typeface="Calibri"/>
-              </a:rPr>
-              <a:t>Load the starter, run the analysis once, and read the metrics panel</a:t>
-            </a:r>
-          </a:p>
-          <a:p>
-            <a:pPr lvl="0" marL="457200" indent="-228600">
-              <a:buFont typeface="Calibri"/>
-              <a:spcAft>
-                <a:spcPts val="1000"/>
-              </a:spcAft>
-              <a:buSzPct val="100000"/>
-              <a:buChar char="•"/>
-              <a:lnSpc>
-                <a:spcPts val="2200"/>
-              </a:lnSpc>
-            </a:pPr>
-            <a:r>
-              <a:rPr sz="2000" b="0">
-                <a:solidFill>
-                  <a:srgbClr val="333333"/>
-                </a:solidFill>
-                <a:latin typeface="Calibri"/>
-              </a:rPr>
-              <a:t>Orient yourself, challenge panel, canvas, Check, then mirror the same goldens in code</a:t>
-            </a:r>
-          </a:p>
-        </p:txBody>
-      </p:sp>
-      <p:sp>
-        <p:nvSpPr>
-          <p:cNvPr id="4" name="TextBox 3"/>
-          <p:cNvSpPr txBox="1"/>
-          <p:nvPr/>
-        </p:nvSpPr>
-        <p:spPr>
-          <a:xfrm>
-            <a:off x="548640" y="6355080"/>
-            <a:ext cx="11064240" cy="320040"/>
-          </a:xfrm>
-          <a:prstGeom prst="rect">
-            <a:avLst/>
-          </a:prstGeom>
-          <a:noFill/>
-        </p:spPr>
-        <p:txBody>
-          <a:bodyPr wrap="square">
-            <a:noAutofit/>
-          </a:bodyPr>
-          <a:lstStyle/>
-          <a:p>
-            <a:pPr algn="r">
-              <a:lnSpc>
-                <a:spcPts val="2200"/>
-              </a:lnSpc>
-              <a:defRPr sz="1000" b="0">
-                <a:solidFill>
-                  <a:srgbClr val="666666"/>
-                </a:solidFill>
-                <a:latin typeface="Calibri"/>
-              </a:defRPr>
-            </a:pPr>
-            <a:r>
-              <a:t>learn_sta — 01 timing graph</a:t>
-            </a:r>
-          </a:p>
-        </p:txBody>
-      </p:sp>
-    </p:spTree>
-  </p:cSld>
-  <p:clrMapOvr>
-    <a:masterClrMapping/>
-  </p:clrMapOvr>
-</p:sld>
-</file>
-
-<file path=ppt/slides/slide9.xml><?xml version="1.0" encoding="utf-8"?>
-<p:sld xmlns:a="http://schemas.openxmlformats.org/drawingml/2006/main" xmlns:p="http://schemas.openxmlformats.org/presentationml/2006/main" xmlns:r="http://schemas.openxmlformats.org/officeDocument/2006/relationships">
-  <p:cSld>
-    <p:spTree>
-      <p:nvGrpSpPr>
-        <p:cNvPr id="1" name=""/>
-        <p:cNvGrpSpPr/>
-        <p:nvPr/>
-      </p:nvGrpSpPr>
-      <p:grpSpPr/>
-      <p:sp>
-        <p:nvSpPr>
-          <p:cNvPr id="2" name="TextBox 1"/>
-          <p:cNvSpPr txBox="1"/>
-          <p:nvPr/>
-        </p:nvSpPr>
-        <p:spPr>
-          <a:xfrm>
-            <a:off x="548640" y="411480"/>
-            <a:ext cx="11064240" cy="777240"/>
-          </a:xfrm>
-          <a:prstGeom prst="rect">
-            <a:avLst/>
-          </a:prstGeom>
-          <a:noFill/>
-        </p:spPr>
-        <p:txBody>
-          <a:bodyPr wrap="square">
-            <a:noAutofit/>
-          </a:bodyPr>
-          <a:lstStyle/>
-          <a:p>
-            <a:pPr>
-              <a:lnSpc>
-                <a:spcPts val="2200"/>
-              </a:lnSpc>
-            </a:pPr>
-            <a:r>
-              <a:rPr sz="2800" b="1">
-                <a:solidFill>
-                  <a:srgbClr val="1A1A2E"/>
-                </a:solidFill>
-                <a:latin typeface="Calibri"/>
-              </a:rPr>
-              <a:t>Implement track</a:t>
-            </a:r>
-          </a:p>
-        </p:txBody>
-      </p:sp>
-      <p:sp>
-        <p:nvSpPr>
-          <p:cNvPr id="3" name="TextBox 2"/>
-          <p:cNvSpPr txBox="1"/>
-          <p:nvPr/>
-        </p:nvSpPr>
-        <p:spPr>
-          <a:xfrm>
-            <a:off x="548640" y="1234440"/>
-            <a:ext cx="11064240" cy="4937760"/>
-          </a:xfrm>
-          <a:prstGeom prst="rect">
-            <a:avLst/>
-          </a:prstGeom>
-          <a:noFill/>
-        </p:spPr>
-        <p:txBody>
-          <a:bodyPr wrap="square">
-            <a:noAutofit/>
-          </a:bodyPr>
-          <a:lstStyle/>
-          <a:p>
-            <a:pPr lvl="0" marL="457200" indent="-228600">
-              <a:buFont typeface="Calibri"/>
-              <a:spcAft>
-                <a:spcPts val="1000"/>
-              </a:spcAft>
-              <a:buSzPct val="100000"/>
-              <a:buChar char="•"/>
-              <a:lnSpc>
-                <a:spcPts val="2200"/>
-              </a:lnSpc>
-            </a:pPr>
-            <a:r>
-              <a:rPr sz="2000" b="0">
-                <a:solidFill>
-                  <a:srgbClr val="333333"/>
-                </a:solidFill>
-                <a:latin typeface="Calibri"/>
-              </a:rPr>
-              <a:t>In the implement track</a:t>
-            </a:r>
-          </a:p>
-          <a:p>
-            <a:pPr lvl="0" marL="457200" indent="-228600">
-              <a:buFont typeface="Calibri"/>
-              <a:spcAft>
-                <a:spcPts val="1000"/>
-              </a:spcAft>
-              <a:buSzPct val="100000"/>
-              <a:buChar char="•"/>
-              <a:lnSpc>
-                <a:spcPts val="2200"/>
-              </a:lnSpc>
-            </a:pPr>
-            <a:r>
-              <a:rPr sz="2000" b="0">
-                <a:solidFill>
-                  <a:srgbClr val="333333"/>
-                </a:solidFill>
-                <a:latin typeface="Calibri"/>
-              </a:rPr>
-              <a:t>Run `python3 common/test_propagate.py` (and the timing-graph test) until the goldens print</a:t>
-            </a:r>
-          </a:p>
-        </p:txBody>
-      </p:sp>
-      <p:sp>
-        <p:nvSpPr>
-          <p:cNvPr id="4" name="TextBox 3"/>
           <p:cNvSpPr txBox="1"/>
           <p:nvPr/>
         </p:nvSpPr>
